--- a/Question_1/Question_1.pptx
+++ b/Question_1/Question_1.pptx
@@ -3181,7 +3181,7 @@
             </a:pPr>
             <a:r>
               <a:rPr/>
-              <a:t>2026-06-17</a:t>
+              <a:t>2026-06-18</a:t>
             </a:r>
           </a:p>
         </p:txBody>
